--- a/deliverables/chem-u02/SHULL_CHEM_Slides_U02_S02.3_Static.pptx
+++ b/deliverables/chem-u02/SHULL_CHEM_Slides_U02_S02.3_Static.pptx
@@ -1599,7 +1599,7 @@
           <a:p>
             <a:r>
               <a:rPr lang="en-US" dirty="0"/>
-              <a:t>STUDENT LEVEL (simplified; say so out loud): 4s and 3d are very close in energy here. Moving one 4s electron gives a completely filled 3d (Cu) or a half-filled 3d with all five spins parallel (Cr). That lowers the atom's total energy slightly, so the real atom does that. This explains Cr and Cu; it does not predict every exception, and in this course students learn Cr and Cu and look the rest up. Do NOT say that half-full and full are always more stable. TEACHER LEVEL: the near-degeneracy of 4s and 3d is what lets a small energy change decide the arrangement. Textbook accounts cite exchange stabilization (same-spin electrons in different orbitals lower the energy; Cr has six parallel spins) and reduced electron-electron repulsion. PROVISIONAL: the textbook story is simpler than the real energy accounting, which needs electron-correlation calculations; that is why the heuristic fails. COUNTEREXAMPLES (PROVISIONAL: the script checks only that the electron totals are 41 and 74; confirm the configurations against a source before quoting or testing): Nb is [Kr] 5s^1 4d^4, an exception that is not half-full or full; W is the regular [Xe] 6s^2 4f^14 5d^4 although Cr and Mo, in the same group, are exceptions. So the heuristic is not a predictor. Mo, Ag and Au (one period down) are not taught and not checked here. Forward pointer to S2.4: the 4s^1 electron leaves first, so Cu^+ = [Ar] 3d^10 and Cu^2+ = [Ar] 3d^9. Image prompt (aside slot): a coil of copper wire beside a chromium-plated tap on a lab bench.</a:t>
+              <a:t>STUDENT LEVEL (simplified; say so out loud): 4s and 3d are very close in energy here. Moving one 4s electron gives a completely filled 3d (Cu) or a half-filled 3d with all five spins parallel (Cr). That lowers the atom's total energy slightly, so the real atom does that. This explains Cr and Cu; it does not predict every exception, and in this course students learn Cr and Cu and look the rest up. Do NOT say that half-full and full are always more stable. TEACHER LEVEL: the near-degeneracy of 4s and 3d is what lets a small energy change decide the arrangement. Textbook accounts cite exchange stabilization (same-spin electrons in different orbitals lower the energy; Cr has six parallel spins) and reduced electron-electron repulsion. PROVISIONAL: the textbook story is simpler than the real energy accounting, which needs electron-correlation calculations; that is why the heuristic fails. COUNTEREXAMPLES (checked against a secondary dataset, the mendeleev PyPI package, for Cr, Cu, Nb, Mo, W, Ag and Au; NIST was not reachable from here; still PROVISIONAL until Matt or a source confirms. The script itself checks only that the electron totals are 41 and 74): Nb is [Kr] 5s^1 4d^4, an exception that is not half-full or full; W is the regular [Xe] 6s^2 4f^14 5d^4 although Cr and Mo, in the same group, are exceptions. So the heuristic is not a predictor. Mo, Ag and Au (one period down) are not taught and not checked here. Forward pointer to S2.4: the 4s^1 electron leaves first, so Cu^+ = [Ar] 3d^10 and Cu^2+ = [Ar] 3d^9. Image prompt (aside slot): a coil of copper wire beside a chromium-plated tap on a lab bench.</a:t>
             </a:r>
             <a:endParaRPr lang="en-US" dirty="0"/>
           </a:p>
@@ -15451,7 +15451,13 @@
       </p:grpSp>
       <p:sp>
         <p:nvSpPr>
-          <p:cNvPr id="22" name="BUILD arrow 1s box1 up" descr="Up arrow in 1s box 1"/>
+          <p:cNvPr id="22" name="BUILD arrow 1s box1 up" descr="">
+            <a:extLst>
+              <a:ext uri="{C183D7F6-B498-43B3-948B-1728B52AA6E4}">
+                <adec:decorative xmlns:adec="http://schemas.microsoft.com/office/drawing/2017/decorative" val="1"/>
+              </a:ext>
+            </a:extLst>
+          </p:cNvPr>
           <p:cNvSpPr/>
           <p:nvPr/>
         </p:nvSpPr>
@@ -15498,7 +15504,13 @@
       </p:sp>
       <p:sp>
         <p:nvSpPr>
-          <p:cNvPr id="23" name="BUILD arrow 1s box1 down" descr="Down arrow in 1s box 1"/>
+          <p:cNvPr id="23" name="BUILD arrow 1s box1 down" descr="">
+            <a:extLst>
+              <a:ext uri="{C183D7F6-B498-43B3-948B-1728B52AA6E4}">
+                <adec:decorative xmlns:adec="http://schemas.microsoft.com/office/drawing/2017/decorative" val="1"/>
+              </a:ext>
+            </a:extLst>
+          </p:cNvPr>
           <p:cNvSpPr/>
           <p:nvPr/>
         </p:nvSpPr>
@@ -15545,7 +15557,13 @@
       </p:sp>
       <p:sp>
         <p:nvSpPr>
-          <p:cNvPr id="24" name="BUILD arrow 2s box1 up" descr="Up arrow in 2s box 1"/>
+          <p:cNvPr id="24" name="BUILD arrow 2s box1 up" descr="">
+            <a:extLst>
+              <a:ext uri="{C183D7F6-B498-43B3-948B-1728B52AA6E4}">
+                <adec:decorative xmlns:adec="http://schemas.microsoft.com/office/drawing/2017/decorative" val="1"/>
+              </a:ext>
+            </a:extLst>
+          </p:cNvPr>
           <p:cNvSpPr/>
           <p:nvPr/>
         </p:nvSpPr>
@@ -15592,7 +15610,13 @@
       </p:sp>
       <p:sp>
         <p:nvSpPr>
-          <p:cNvPr id="25" name="BUILD arrow 2s box1 down" descr="Down arrow in 2s box 1"/>
+          <p:cNvPr id="25" name="BUILD arrow 2s box1 down" descr="">
+            <a:extLst>
+              <a:ext uri="{C183D7F6-B498-43B3-948B-1728B52AA6E4}">
+                <adec:decorative xmlns:adec="http://schemas.microsoft.com/office/drawing/2017/decorative" val="1"/>
+              </a:ext>
+            </a:extLst>
+          </p:cNvPr>
           <p:cNvSpPr/>
           <p:nvPr/>
         </p:nvSpPr>
@@ -15639,7 +15663,13 @@
       </p:sp>
       <p:sp>
         <p:nvSpPr>
-          <p:cNvPr id="26" name="BUILD arrow 2p box1 up" descr="Up arrow in 2p box 1"/>
+          <p:cNvPr id="26" name="BUILD arrow 2p box1 up" descr="">
+            <a:extLst>
+              <a:ext uri="{C183D7F6-B498-43B3-948B-1728B52AA6E4}">
+                <adec:decorative xmlns:adec="http://schemas.microsoft.com/office/drawing/2017/decorative" val="1"/>
+              </a:ext>
+            </a:extLst>
+          </p:cNvPr>
           <p:cNvSpPr/>
           <p:nvPr/>
         </p:nvSpPr>
@@ -15686,7 +15716,13 @@
       </p:sp>
       <p:sp>
         <p:nvSpPr>
-          <p:cNvPr id="27" name="BUILD arrow 2p box2 up" descr="Up arrow in 2p box 2"/>
+          <p:cNvPr id="27" name="BUILD arrow 2p box2 up" descr="">
+            <a:extLst>
+              <a:ext uri="{C183D7F6-B498-43B3-948B-1728B52AA6E4}">
+                <adec:decorative xmlns:adec="http://schemas.microsoft.com/office/drawing/2017/decorative" val="1"/>
+              </a:ext>
+            </a:extLst>
+          </p:cNvPr>
           <p:cNvSpPr/>
           <p:nvPr/>
         </p:nvSpPr>
@@ -15733,7 +15769,13 @@
       </p:sp>
       <p:sp>
         <p:nvSpPr>
-          <p:cNvPr id="28" name="BUILD arrow 2p box3 up" descr="Up arrow in 2p box 3"/>
+          <p:cNvPr id="28" name="BUILD arrow 2p box3 up" descr="">
+            <a:extLst>
+              <a:ext uri="{C183D7F6-B498-43B3-948B-1728B52AA6E4}">
+                <adec:decorative xmlns:adec="http://schemas.microsoft.com/office/drawing/2017/decorative" val="1"/>
+              </a:ext>
+            </a:extLst>
+          </p:cNvPr>
           <p:cNvSpPr/>
           <p:nvPr/>
         </p:nvSpPr>
@@ -15780,7 +15822,13 @@
       </p:sp>
       <p:sp>
         <p:nvSpPr>
-          <p:cNvPr id="29" name="BUILD arrow 2p box1 down" descr="Down arrow in 2p box 1"/>
+          <p:cNvPr id="29" name="BUILD arrow 2p box1 down" descr="">
+            <a:extLst>
+              <a:ext uri="{C183D7F6-B498-43B3-948B-1728B52AA6E4}">
+                <adec:decorative xmlns:adec="http://schemas.microsoft.com/office/drawing/2017/decorative" val="1"/>
+              </a:ext>
+            </a:extLst>
+          </p:cNvPr>
           <p:cNvSpPr/>
           <p:nvPr/>
         </p:nvSpPr>
@@ -20936,7 +20984,13 @@
       </p:grpSp>
       <p:sp>
         <p:nvSpPr>
-          <p:cNvPr id="22" name="BUILD arrow 4s box1 up" descr="Up arrow in 4s box 1"/>
+          <p:cNvPr id="22" name="BUILD arrow 4s box1 up" descr="">
+            <a:extLst>
+              <a:ext uri="{C183D7F6-B498-43B3-948B-1728B52AA6E4}">
+                <adec:decorative xmlns:adec="http://schemas.microsoft.com/office/drawing/2017/decorative" val="1"/>
+              </a:ext>
+            </a:extLst>
+          </p:cNvPr>
           <p:cNvSpPr/>
           <p:nvPr/>
         </p:nvSpPr>
@@ -20983,7 +21037,13 @@
       </p:sp>
       <p:sp>
         <p:nvSpPr>
-          <p:cNvPr id="23" name="BUILD arrow 4s box1 down" descr="Down arrow in 4s box 1"/>
+          <p:cNvPr id="23" name="BUILD arrow 4s box1 down" descr="">
+            <a:extLst>
+              <a:ext uri="{C183D7F6-B498-43B3-948B-1728B52AA6E4}">
+                <adec:decorative xmlns:adec="http://schemas.microsoft.com/office/drawing/2017/decorative" val="1"/>
+              </a:ext>
+            </a:extLst>
+          </p:cNvPr>
           <p:cNvSpPr/>
           <p:nvPr/>
         </p:nvSpPr>
@@ -21030,7 +21090,13 @@
       </p:sp>
       <p:sp>
         <p:nvSpPr>
-          <p:cNvPr id="24" name="BUILD arrow 3d box1 up" descr="Up arrow in 3d box 1"/>
+          <p:cNvPr id="24" name="BUILD arrow 3d box1 up" descr="">
+            <a:extLst>
+              <a:ext uri="{C183D7F6-B498-43B3-948B-1728B52AA6E4}">
+                <adec:decorative xmlns:adec="http://schemas.microsoft.com/office/drawing/2017/decorative" val="1"/>
+              </a:ext>
+            </a:extLst>
+          </p:cNvPr>
           <p:cNvSpPr/>
           <p:nvPr/>
         </p:nvSpPr>
@@ -21077,7 +21143,13 @@
       </p:sp>
       <p:sp>
         <p:nvSpPr>
-          <p:cNvPr id="25" name="BUILD arrow 3d box2 up" descr="Up arrow in 3d box 2"/>
+          <p:cNvPr id="25" name="BUILD arrow 3d box2 up" descr="">
+            <a:extLst>
+              <a:ext uri="{C183D7F6-B498-43B3-948B-1728B52AA6E4}">
+                <adec:decorative xmlns:adec="http://schemas.microsoft.com/office/drawing/2017/decorative" val="1"/>
+              </a:ext>
+            </a:extLst>
+          </p:cNvPr>
           <p:cNvSpPr/>
           <p:nvPr/>
         </p:nvSpPr>
@@ -21124,7 +21196,13 @@
       </p:sp>
       <p:sp>
         <p:nvSpPr>
-          <p:cNvPr id="26" name="BUILD arrow 3d box3 up" descr="Up arrow in 3d box 3"/>
+          <p:cNvPr id="26" name="BUILD arrow 3d box3 up" descr="">
+            <a:extLst>
+              <a:ext uri="{C183D7F6-B498-43B3-948B-1728B52AA6E4}">
+                <adec:decorative xmlns:adec="http://schemas.microsoft.com/office/drawing/2017/decorative" val="1"/>
+              </a:ext>
+            </a:extLst>
+          </p:cNvPr>
           <p:cNvSpPr/>
           <p:nvPr/>
         </p:nvSpPr>
@@ -21171,7 +21249,13 @@
       </p:sp>
       <p:sp>
         <p:nvSpPr>
-          <p:cNvPr id="27" name="BUILD arrow 3d box4 up" descr="Up arrow in 3d box 4"/>
+          <p:cNvPr id="27" name="BUILD arrow 3d box4 up" descr="">
+            <a:extLst>
+              <a:ext uri="{C183D7F6-B498-43B3-948B-1728B52AA6E4}">
+                <adec:decorative xmlns:adec="http://schemas.microsoft.com/office/drawing/2017/decorative" val="1"/>
+              </a:ext>
+            </a:extLst>
+          </p:cNvPr>
           <p:cNvSpPr/>
           <p:nvPr/>
         </p:nvSpPr>
@@ -21218,7 +21302,13 @@
       </p:sp>
       <p:sp>
         <p:nvSpPr>
-          <p:cNvPr id="28" name="BUILD arrow 3d box5 up" descr="Up arrow in 3d box 5"/>
+          <p:cNvPr id="28" name="BUILD arrow 3d box5 up" descr="">
+            <a:extLst>
+              <a:ext uri="{C183D7F6-B498-43B3-948B-1728B52AA6E4}">
+                <adec:decorative xmlns:adec="http://schemas.microsoft.com/office/drawing/2017/decorative" val="1"/>
+              </a:ext>
+            </a:extLst>
+          </p:cNvPr>
           <p:cNvSpPr/>
           <p:nvPr/>
         </p:nvSpPr>
@@ -21265,7 +21355,13 @@
       </p:sp>
       <p:sp>
         <p:nvSpPr>
-          <p:cNvPr id="29" name="BUILD arrow 3d box1 down" descr="Down arrow in 3d box 1"/>
+          <p:cNvPr id="29" name="BUILD arrow 3d box1 down" descr="">
+            <a:extLst>
+              <a:ext uri="{C183D7F6-B498-43B3-948B-1728B52AA6E4}">
+                <adec:decorative xmlns:adec="http://schemas.microsoft.com/office/drawing/2017/decorative" val="1"/>
+              </a:ext>
+            </a:extLst>
+          </p:cNvPr>
           <p:cNvSpPr/>
           <p:nvPr/>
         </p:nvSpPr>
@@ -22578,7 +22674,13 @@
       </p:grpSp>
       <p:sp>
         <p:nvSpPr>
-          <p:cNvPr id="24" name="BUILD arrow 4s box1 up" descr="Up arrow in 4s box 1"/>
+          <p:cNvPr id="24" name="BUILD arrow 4s box1 up" descr="">
+            <a:extLst>
+              <a:ext uri="{C183D7F6-B498-43B3-948B-1728B52AA6E4}">
+                <adec:decorative xmlns:adec="http://schemas.microsoft.com/office/drawing/2017/decorative" val="1"/>
+              </a:ext>
+            </a:extLst>
+          </p:cNvPr>
           <p:cNvSpPr/>
           <p:nvPr/>
         </p:nvSpPr>
@@ -22625,7 +22727,13 @@
       </p:sp>
       <p:sp>
         <p:nvSpPr>
-          <p:cNvPr id="26" name="BUILD arrow 3d box1 up" descr="Up arrow in 3d box 1"/>
+          <p:cNvPr id="26" name="BUILD arrow 3d box1 up" descr="">
+            <a:extLst>
+              <a:ext uri="{C183D7F6-B498-43B3-948B-1728B52AA6E4}">
+                <adec:decorative xmlns:adec="http://schemas.microsoft.com/office/drawing/2017/decorative" val="1"/>
+              </a:ext>
+            </a:extLst>
+          </p:cNvPr>
           <p:cNvSpPr/>
           <p:nvPr/>
         </p:nvSpPr>
@@ -22672,7 +22780,13 @@
       </p:sp>
       <p:sp>
         <p:nvSpPr>
-          <p:cNvPr id="27" name="BUILD arrow 3d box2 up" descr="Up arrow in 3d box 2"/>
+          <p:cNvPr id="27" name="BUILD arrow 3d box2 up" descr="">
+            <a:extLst>
+              <a:ext uri="{C183D7F6-B498-43B3-948B-1728B52AA6E4}">
+                <adec:decorative xmlns:adec="http://schemas.microsoft.com/office/drawing/2017/decorative" val="1"/>
+              </a:ext>
+            </a:extLst>
+          </p:cNvPr>
           <p:cNvSpPr/>
           <p:nvPr/>
         </p:nvSpPr>
@@ -22719,7 +22833,13 @@
       </p:sp>
       <p:sp>
         <p:nvSpPr>
-          <p:cNvPr id="28" name="BUILD arrow 3d box3 up" descr="Up arrow in 3d box 3"/>
+          <p:cNvPr id="28" name="BUILD arrow 3d box3 up" descr="">
+            <a:extLst>
+              <a:ext uri="{C183D7F6-B498-43B3-948B-1728B52AA6E4}">
+                <adec:decorative xmlns:adec="http://schemas.microsoft.com/office/drawing/2017/decorative" val="1"/>
+              </a:ext>
+            </a:extLst>
+          </p:cNvPr>
           <p:cNvSpPr/>
           <p:nvPr/>
         </p:nvSpPr>
@@ -22766,7 +22886,13 @@
       </p:sp>
       <p:sp>
         <p:nvSpPr>
-          <p:cNvPr id="29" name="BUILD arrow 3d box4 up" descr="Up arrow in 3d box 4"/>
+          <p:cNvPr id="29" name="BUILD arrow 3d box4 up" descr="">
+            <a:extLst>
+              <a:ext uri="{C183D7F6-B498-43B3-948B-1728B52AA6E4}">
+                <adec:decorative xmlns:adec="http://schemas.microsoft.com/office/drawing/2017/decorative" val="1"/>
+              </a:ext>
+            </a:extLst>
+          </p:cNvPr>
           <p:cNvSpPr/>
           <p:nvPr/>
         </p:nvSpPr>
@@ -22813,7 +22939,13 @@
       </p:sp>
       <p:sp>
         <p:nvSpPr>
-          <p:cNvPr id="30" name="BUILD arrow 3d box5 up" descr="Up arrow in 3d box 5"/>
+          <p:cNvPr id="30" name="BUILD arrow 3d box5 up" descr="">
+            <a:extLst>
+              <a:ext uri="{C183D7F6-B498-43B3-948B-1728B52AA6E4}">
+                <adec:decorative xmlns:adec="http://schemas.microsoft.com/office/drawing/2017/decorative" val="1"/>
+              </a:ext>
+            </a:extLst>
+          </p:cNvPr>
           <p:cNvSpPr/>
           <p:nvPr/>
         </p:nvSpPr>
@@ -22860,7 +22992,13 @@
       </p:sp>
       <p:sp>
         <p:nvSpPr>
-          <p:cNvPr id="31" name="BUILD arrow 3d box1 down" descr="Down arrow in 3d box 1"/>
+          <p:cNvPr id="31" name="BUILD arrow 3d box1 down" descr="">
+            <a:extLst>
+              <a:ext uri="{C183D7F6-B498-43B3-948B-1728B52AA6E4}">
+                <adec:decorative xmlns:adec="http://schemas.microsoft.com/office/drawing/2017/decorative" val="1"/>
+              </a:ext>
+            </a:extLst>
+          </p:cNvPr>
           <p:cNvSpPr/>
           <p:nvPr/>
         </p:nvSpPr>
@@ -22907,7 +23045,13 @@
       </p:sp>
       <p:sp>
         <p:nvSpPr>
-          <p:cNvPr id="32" name="BUILD arrow 3d box2 down" descr="Down arrow in 3d box 2"/>
+          <p:cNvPr id="32" name="BUILD arrow 3d box2 down" descr="">
+            <a:extLst>
+              <a:ext uri="{C183D7F6-B498-43B3-948B-1728B52AA6E4}">
+                <adec:decorative xmlns:adec="http://schemas.microsoft.com/office/drawing/2017/decorative" val="1"/>
+              </a:ext>
+            </a:extLst>
+          </p:cNvPr>
           <p:cNvSpPr/>
           <p:nvPr/>
         </p:nvSpPr>
@@ -22954,7 +23098,13 @@
       </p:sp>
       <p:sp>
         <p:nvSpPr>
-          <p:cNvPr id="33" name="BUILD arrow 3d box3 down" descr="Down arrow in 3d box 3"/>
+          <p:cNvPr id="33" name="BUILD arrow 3d box3 down" descr="">
+            <a:extLst>
+              <a:ext uri="{C183D7F6-B498-43B3-948B-1728B52AA6E4}">
+                <adec:decorative xmlns:adec="http://schemas.microsoft.com/office/drawing/2017/decorative" val="1"/>
+              </a:ext>
+            </a:extLst>
+          </p:cNvPr>
           <p:cNvSpPr/>
           <p:nvPr/>
         </p:nvSpPr>
@@ -23001,7 +23151,13 @@
       </p:sp>
       <p:sp>
         <p:nvSpPr>
-          <p:cNvPr id="34" name="BUILD arrow 3d box4 down" descr="Down arrow in 3d box 4"/>
+          <p:cNvPr id="34" name="BUILD arrow 3d box4 down" descr="">
+            <a:extLst>
+              <a:ext uri="{C183D7F6-B498-43B3-948B-1728B52AA6E4}">
+                <adec:decorative xmlns:adec="http://schemas.microsoft.com/office/drawing/2017/decorative" val="1"/>
+              </a:ext>
+            </a:extLst>
+          </p:cNvPr>
           <p:cNvSpPr/>
           <p:nvPr/>
         </p:nvSpPr>
@@ -23048,7 +23204,13 @@
       </p:sp>
       <p:sp>
         <p:nvSpPr>
-          <p:cNvPr id="35" name="BUILD arrow 3d box5 down" descr="Down arrow in 3d box 5"/>
+          <p:cNvPr id="35" name="BUILD arrow 3d box5 down" descr="">
+            <a:extLst>
+              <a:ext uri="{C183D7F6-B498-43B3-948B-1728B52AA6E4}">
+                <adec:decorative xmlns:adec="http://schemas.microsoft.com/office/drawing/2017/decorative" val="1"/>
+              </a:ext>
+            </a:extLst>
+          </p:cNvPr>
           <p:cNvSpPr/>
           <p:nvPr/>
         </p:nvSpPr>
@@ -24268,7 +24430,13 @@
       </p:grpSp>
       <p:sp>
         <p:nvSpPr>
-          <p:cNvPr id="24" name="BUILD arrow 4s box1 up" descr="Up arrow in 4s box 1"/>
+          <p:cNvPr id="24" name="BUILD arrow 4s box1 up" descr="">
+            <a:extLst>
+              <a:ext uri="{C183D7F6-B498-43B3-948B-1728B52AA6E4}">
+                <adec:decorative xmlns:adec="http://schemas.microsoft.com/office/drawing/2017/decorative" val="1"/>
+              </a:ext>
+            </a:extLst>
+          </p:cNvPr>
           <p:cNvSpPr/>
           <p:nvPr/>
         </p:nvSpPr>
@@ -24315,7 +24483,13 @@
       </p:sp>
       <p:sp>
         <p:nvSpPr>
-          <p:cNvPr id="26" name="BUILD arrow 3d box1 up" descr="Up arrow in 3d box 1"/>
+          <p:cNvPr id="26" name="BUILD arrow 3d box1 up" descr="">
+            <a:extLst>
+              <a:ext uri="{C183D7F6-B498-43B3-948B-1728B52AA6E4}">
+                <adec:decorative xmlns:adec="http://schemas.microsoft.com/office/drawing/2017/decorative" val="1"/>
+              </a:ext>
+            </a:extLst>
+          </p:cNvPr>
           <p:cNvSpPr/>
           <p:nvPr/>
         </p:nvSpPr>
@@ -24362,7 +24536,13 @@
       </p:sp>
       <p:sp>
         <p:nvSpPr>
-          <p:cNvPr id="27" name="BUILD arrow 3d box2 up" descr="Up arrow in 3d box 2"/>
+          <p:cNvPr id="27" name="BUILD arrow 3d box2 up" descr="">
+            <a:extLst>
+              <a:ext uri="{C183D7F6-B498-43B3-948B-1728B52AA6E4}">
+                <adec:decorative xmlns:adec="http://schemas.microsoft.com/office/drawing/2017/decorative" val="1"/>
+              </a:ext>
+            </a:extLst>
+          </p:cNvPr>
           <p:cNvSpPr/>
           <p:nvPr/>
         </p:nvSpPr>
@@ -24409,7 +24589,13 @@
       </p:sp>
       <p:sp>
         <p:nvSpPr>
-          <p:cNvPr id="28" name="BUILD arrow 3d box3 up" descr="Up arrow in 3d box 3"/>
+          <p:cNvPr id="28" name="BUILD arrow 3d box3 up" descr="">
+            <a:extLst>
+              <a:ext uri="{C183D7F6-B498-43B3-948B-1728B52AA6E4}">
+                <adec:decorative xmlns:adec="http://schemas.microsoft.com/office/drawing/2017/decorative" val="1"/>
+              </a:ext>
+            </a:extLst>
+          </p:cNvPr>
           <p:cNvSpPr/>
           <p:nvPr/>
         </p:nvSpPr>
@@ -24456,7 +24642,13 @@
       </p:sp>
       <p:sp>
         <p:nvSpPr>
-          <p:cNvPr id="29" name="BUILD arrow 3d box4 up" descr="Up arrow in 3d box 4"/>
+          <p:cNvPr id="29" name="BUILD arrow 3d box4 up" descr="">
+            <a:extLst>
+              <a:ext uri="{C183D7F6-B498-43B3-948B-1728B52AA6E4}">
+                <adec:decorative xmlns:adec="http://schemas.microsoft.com/office/drawing/2017/decorative" val="1"/>
+              </a:ext>
+            </a:extLst>
+          </p:cNvPr>
           <p:cNvSpPr/>
           <p:nvPr/>
         </p:nvSpPr>
@@ -24503,7 +24695,13 @@
       </p:sp>
       <p:sp>
         <p:nvSpPr>
-          <p:cNvPr id="30" name="BUILD arrow 3d box5 up" descr="Up arrow in 3d box 5"/>
+          <p:cNvPr id="30" name="BUILD arrow 3d box5 up" descr="">
+            <a:extLst>
+              <a:ext uri="{C183D7F6-B498-43B3-948B-1728B52AA6E4}">
+                <adec:decorative xmlns:adec="http://schemas.microsoft.com/office/drawing/2017/decorative" val="1"/>
+              </a:ext>
+            </a:extLst>
+          </p:cNvPr>
           <p:cNvSpPr/>
           <p:nvPr/>
         </p:nvSpPr>
@@ -32135,7 +32333,13 @@
       </p:grpSp>
       <p:sp>
         <p:nvSpPr>
-          <p:cNvPr id="24" name="BUILD arrow 1s box1 up" descr="Up arrow in 1s box 1"/>
+          <p:cNvPr id="24" name="BUILD arrow 1s box1 up" descr="">
+            <a:extLst>
+              <a:ext uri="{C183D7F6-B498-43B3-948B-1728B52AA6E4}">
+                <adec:decorative xmlns:adec="http://schemas.microsoft.com/office/drawing/2017/decorative" val="1"/>
+              </a:ext>
+            </a:extLst>
+          </p:cNvPr>
           <p:cNvSpPr/>
           <p:nvPr/>
         </p:nvSpPr>
@@ -32182,7 +32386,13 @@
       </p:sp>
       <p:sp>
         <p:nvSpPr>
-          <p:cNvPr id="25" name="BUILD arrow 1s box1 down" descr="Down arrow in 1s box 1"/>
+          <p:cNvPr id="25" name="BUILD arrow 1s box1 down" descr="">
+            <a:extLst>
+              <a:ext uri="{C183D7F6-B498-43B3-948B-1728B52AA6E4}">
+                <adec:decorative xmlns:adec="http://schemas.microsoft.com/office/drawing/2017/decorative" val="1"/>
+              </a:ext>
+            </a:extLst>
+          </p:cNvPr>
           <p:cNvSpPr/>
           <p:nvPr/>
         </p:nvSpPr>
@@ -32229,7 +32439,13 @@
       </p:sp>
       <p:sp>
         <p:nvSpPr>
-          <p:cNvPr id="26" name="BUILD arrow 2s box1 up" descr="Up arrow in 2s box 1"/>
+          <p:cNvPr id="26" name="BUILD arrow 2s box1 up" descr="">
+            <a:extLst>
+              <a:ext uri="{C183D7F6-B498-43B3-948B-1728B52AA6E4}">
+                <adec:decorative xmlns:adec="http://schemas.microsoft.com/office/drawing/2017/decorative" val="1"/>
+              </a:ext>
+            </a:extLst>
+          </p:cNvPr>
           <p:cNvSpPr/>
           <p:nvPr/>
         </p:nvSpPr>
@@ -32276,7 +32492,13 @@
       </p:sp>
       <p:sp>
         <p:nvSpPr>
-          <p:cNvPr id="27" name="BUILD arrow 2s box1 down" descr="Down arrow in 2s box 1"/>
+          <p:cNvPr id="27" name="BUILD arrow 2s box1 down" descr="">
+            <a:extLst>
+              <a:ext uri="{C183D7F6-B498-43B3-948B-1728B52AA6E4}">
+                <adec:decorative xmlns:adec="http://schemas.microsoft.com/office/drawing/2017/decorative" val="1"/>
+              </a:ext>
+            </a:extLst>
+          </p:cNvPr>
           <p:cNvSpPr/>
           <p:nvPr/>
         </p:nvSpPr>
@@ -32323,7 +32545,13 @@
       </p:sp>
       <p:sp>
         <p:nvSpPr>
-          <p:cNvPr id="28" name="BUILD arrow 2p box1 up" descr="Up arrow in 2p box 1"/>
+          <p:cNvPr id="28" name="BUILD arrow 2p box1 up" descr="">
+            <a:extLst>
+              <a:ext uri="{C183D7F6-B498-43B3-948B-1728B52AA6E4}">
+                <adec:decorative xmlns:adec="http://schemas.microsoft.com/office/drawing/2017/decorative" val="1"/>
+              </a:ext>
+            </a:extLst>
+          </p:cNvPr>
           <p:cNvSpPr/>
           <p:nvPr/>
         </p:nvSpPr>
@@ -32370,7 +32598,13 @@
       </p:sp>
       <p:sp>
         <p:nvSpPr>
-          <p:cNvPr id="29" name="BUILD arrow 2p box2 up" descr="Up arrow in 2p box 2"/>
+          <p:cNvPr id="29" name="BUILD arrow 2p box2 up" descr="">
+            <a:extLst>
+              <a:ext uri="{C183D7F6-B498-43B3-948B-1728B52AA6E4}">
+                <adec:decorative xmlns:adec="http://schemas.microsoft.com/office/drawing/2017/decorative" val="1"/>
+              </a:ext>
+            </a:extLst>
+          </p:cNvPr>
           <p:cNvSpPr/>
           <p:nvPr/>
         </p:nvSpPr>
@@ -32417,7 +32651,13 @@
       </p:sp>
       <p:sp>
         <p:nvSpPr>
-          <p:cNvPr id="30" name="BUILD arrow 2p box3 up" descr="Up arrow in 2p box 3"/>
+          <p:cNvPr id="30" name="BUILD arrow 2p box3 up" descr="">
+            <a:extLst>
+              <a:ext uri="{C183D7F6-B498-43B3-948B-1728B52AA6E4}">
+                <adec:decorative xmlns:adec="http://schemas.microsoft.com/office/drawing/2017/decorative" val="1"/>
+              </a:ext>
+            </a:extLst>
+          </p:cNvPr>
           <p:cNvSpPr/>
           <p:nvPr/>
         </p:nvSpPr>
@@ -33406,7 +33646,13 @@
       </p:grpSp>
       <p:sp>
         <p:nvSpPr>
-          <p:cNvPr id="20" name="BUILD arrow 2p box1 up" descr="Up arrow in 2p box 1"/>
+          <p:cNvPr id="20" name="BUILD arrow 2p box1 up" descr="">
+            <a:extLst>
+              <a:ext uri="{C183D7F6-B498-43B3-948B-1728B52AA6E4}">
+                <adec:decorative xmlns:adec="http://schemas.microsoft.com/office/drawing/2017/decorative" val="1"/>
+              </a:ext>
+            </a:extLst>
+          </p:cNvPr>
           <p:cNvSpPr/>
           <p:nvPr/>
         </p:nvSpPr>
@@ -33453,7 +33699,13 @@
       </p:sp>
       <p:sp>
         <p:nvSpPr>
-          <p:cNvPr id="21" name="BUILD arrow 2p box2 up" descr="Up arrow in 2p box 2"/>
+          <p:cNvPr id="21" name="BUILD arrow 2p box2 up" descr="">
+            <a:extLst>
+              <a:ext uri="{C183D7F6-B498-43B3-948B-1728B52AA6E4}">
+                <adec:decorative xmlns:adec="http://schemas.microsoft.com/office/drawing/2017/decorative" val="1"/>
+              </a:ext>
+            </a:extLst>
+          </p:cNvPr>
           <p:cNvSpPr/>
           <p:nvPr/>
         </p:nvSpPr>
@@ -33500,7 +33752,13 @@
       </p:sp>
       <p:sp>
         <p:nvSpPr>
-          <p:cNvPr id="22" name="BUILD arrow 2p box3 up" descr="Up arrow in 2p box 3"/>
+          <p:cNvPr id="22" name="BUILD arrow 2p box3 up" descr="">
+            <a:extLst>
+              <a:ext uri="{C183D7F6-B498-43B3-948B-1728B52AA6E4}">
+                <adec:decorative xmlns:adec="http://schemas.microsoft.com/office/drawing/2017/decorative" val="1"/>
+              </a:ext>
+            </a:extLst>
+          </p:cNvPr>
           <p:cNvSpPr/>
           <p:nvPr/>
         </p:nvSpPr>
@@ -33547,7 +33805,13 @@
       </p:sp>
       <p:sp>
         <p:nvSpPr>
-          <p:cNvPr id="23" name="BUILD arrow 2p box1 down" descr="Down arrow in 2p box 1"/>
+          <p:cNvPr id="23" name="BUILD arrow 2p box1 down" descr="">
+            <a:extLst>
+              <a:ext uri="{C183D7F6-B498-43B3-948B-1728B52AA6E4}">
+                <adec:decorative xmlns:adec="http://schemas.microsoft.com/office/drawing/2017/decorative" val="1"/>
+              </a:ext>
+            </a:extLst>
+          </p:cNvPr>
           <p:cNvSpPr/>
           <p:nvPr/>
         </p:nvSpPr>

--- a/deliverables/chem-u02/SHULL_CHEM_Slides_U02_S02.3_Static.pptx
+++ b/deliverables/chem-u02/SHULL_CHEM_Slides_U02_S02.3_Static.pptx
@@ -708,7 +708,12 @@
           </a:p>
           <a:p>
             <a:r>
-              <a:t>STATIC FINAL STATE: print and handout copy, no animation. This slide shows the final state of the click build; the animated deck shows it one click at a time.</a:t>
+              <a:t>STATIC FINAL STATE: print and handout copy, no animation. This slide shows the final state of the build.</a:t>
+            </a:r>
+          </a:p>
+          <a:p>
+            <a:r>
+              <a:t>Animated version: SHULL_CHEM_Slides_U02_S02.3.pptx has the click-by-click build.</a:t>
             </a:r>
           </a:p>
         </p:txBody>
@@ -970,12 +975,17 @@
           <a:lstStyle/>
           <a:p>
             <a:r>
-              <a:t>Shorthand build for germanium (Z = 32), on text boxes, one per segment. The CLICK BUILD line at the end says exactly what each click does. Teach it in this order: write the longhand first; find the noble gas that comes BEFORE germanium and highlight those electrons; put that noble gas in brackets; finish the line. Longhand: 1s^2 2s^2 2p^6 3s^2 3p^6 4s^2 3d^10 4p^2, 2+2+6+2+6+2+10+2 = 32. The first five segments total 18 and are exactly argon's configuration, so [Ar] is a placeholder, a substitution like writing one symbol for a long repeated expression in math. Shorthand: [Ar] 4s^2 3d^10 4p^2, 18 + 2 + 10 + 2 = 32, with 2 unpaired electrons (the two 4p singles). Common error (brief): using the noble gas of the element's own period. Krypton ends germanium's period and comes AFTER it (Z = 36 &gt; 32), so [Kr] would claim 36 electrons; the next slide shows the table strip. [Ar] sits against the remaining segments, in the space the highlighted block occupied, so the line reads [Ar] 4s^2 3d^10 4p^2 after click 3; click 4 writes the finished line as the answer to copy. Cl stays on the previous slide as the static example. A static export or print of this slide shows every shape at once (the highlight, the replaced segments and [Ar] overlap); for a handout use the --preview export of scripts/add_click_builds.py.</a:t>
-            </a:r>
-          </a:p>
-          <a:p>
-            <a:r>
-              <a:t>STATIC FINAL STATE: print and handout copy, no animation. This slide shows the final state of the click build (Ge); the animated deck shows it one click at a time.</a:t>
+              <a:t>Shorthand for germanium (Z = 32). Teach it in this order: write the longhand first; find the noble gas that comes BEFORE germanium and mark those electrons; put that noble gas in brackets; finish the line. Longhand: 1s^2 2s^2 2p^6 3s^2 3p^6 4s^2 3d^10 4p^2, 2+2+6+2+6+2+10+2 = 32. The first five segments total 18 and are exactly argon's configuration, so [Ar] is a placeholder, a substitution like writing one symbol for a long repeated expression in math. Shorthand: [Ar] 4s^2 3d^10 4p^2, 18 + 2 + 10 + 2 = 32, with 2 unpaired electrons (the two 4p singles). Common error (brief): using the noble gas of the element's own period. Krypton ends germanium's period and comes AFTER it (Z = 36 &gt; 32), so [Kr] would claim 36 electrons; the next slide shows the table strip. This slide shows the longhand line, the shorthand line under it, and the check sum. Cl stays on the previous slide as the static example.</a:t>
+            </a:r>
+          </a:p>
+          <a:p>
+            <a:r>
+              <a:t>STATIC FINAL STATE: print and handout copy, no animation. This slide shows the final state of the build (Ge).</a:t>
+            </a:r>
+          </a:p>
+          <a:p>
+            <a:r>
+              <a:t>Animated version: SHULL_CHEM_Slides_U02_S02.3.pptx has the click-by-click build.</a:t>
             </a:r>
           </a:p>
         </p:txBody>
@@ -1242,7 +1252,12 @@
           </a:p>
           <a:p>
             <a:r>
-              <a:t>STATIC FINAL STATE: print and handout copy, no animation. This slide shows the final state of the click build; the animated deck shows it one click at a time.</a:t>
+              <a:t>STATIC FINAL STATE: print and handout copy, no animation. This slide shows the final state of the build.</a:t>
+            </a:r>
+          </a:p>
+          <a:p>
+            <a:r>
+              <a:t>Animated version: SHULL_CHEM_Slides_U02_S02.3.pptx has the click-by-click build.</a:t>
             </a:r>
           </a:p>
         </p:txBody>
@@ -1328,12 +1343,17 @@
           <a:lstStyle/>
           <a:p>
             <a:r>
-              <a:t>Copper click build (the CLICK BUILD line at the end gives the clicks). Boxes for 4s and 3d only; the [Ar] core (18 electrons) is not drawn. Click 1: the atom as the rules predict, [Ar] 4s^2 3d^9 (4s before 3d; 18 + 2 + 9 = 29). Click 2: one 4s arrow leaves. Click 3: a 3d down arrow arrives in the fifth box. End: [Ar] 4s^1 3d^10, 18 + 1 + 10 = 29, one unpaired electron (the 4s). Same electron count before and after: an electron MOVES, none is gained. Say 'measured ground state', not 'textbook error'. The arrows are bookkeeping for the end state; the diagram does not track one electron's journey. Forward pointer to S2.4: the 4s^1 electron leaves first, so Cu^+ = [Ar] 3d^10 and Cu^2+ = [Ar] 3d^9 (both checked by the figure script). The reason follows on the Why slide. Do not extend this to Ag or Au: not taught, not checked (look it up).</a:t>
-            </a:r>
-          </a:p>
-          <a:p>
-            <a:r>
-              <a:t>STATIC FINAL STATE: print and handout copy, no animation. This slide shows the final state of the click build (Cu); the animated deck shows it one click at a time.</a:t>
+              <a:t>Copper. Boxes for 4s and 3d only; the [Ar] core (18 electrons) is not drawn. The atom as the rules predict: [Ar] 4s^2 3d^9 (4s before 3d; 18 + 2 + 9 = 29). The measured ground state: [Ar] 4s^1 3d^10, 18 + 1 + 10 = 29, one unpaired electron (the 4s). Same electron count before and after: an electron MOVES from 4s to 3d, none is gained. Say 'measured ground state', not 'textbook error'. The arrows are bookkeeping for the end state; the diagram does not track one electron's journey. Forward pointer to S2.4: the 4s^1 electron leaves first, so Cu^+ = [Ar] 3d^10 and Cu^2+ = [Ar] 3d^9 (both checked by the figure script). The reason follows on the Why slide. Do not extend this to Ag or Au: not taught, not checked (look it up).</a:t>
+            </a:r>
+          </a:p>
+          <a:p>
+            <a:r>
+              <a:t>STATIC FINAL STATE: print and handout copy, no animation. This slide shows the final state of the build (Cu).</a:t>
+            </a:r>
+          </a:p>
+          <a:p>
+            <a:r>
+              <a:t>Animated version: SHULL_CHEM_Slides_U02_S02.3.pptx has the click-by-click build.</a:t>
             </a:r>
           </a:p>
         </p:txBody>
@@ -1419,12 +1439,17 @@
           <a:lstStyle/>
           <a:p>
             <a:r>
-              <a:t>Chromium click build. Click 1: predicted [Ar] 4s^2 3d^4 (18 + 2 + 4 = 24): four up arrows in 3d and one empty box. Click 2: one 4s arrow leaves. Click 3: an up arrow arrives in the fifth 3d box. End: [Ar] 4s^1 3d^5, 18 + 1 + 5 = 24; every box in 4s and 3d holds exactly one up arrow, all spins parallel (Hund), so 6 unpaired electrons, more than iron's 4. The arrows are bookkeeping for the end state: the arrow that leaves 4s is the down one and the arrow that arrives in 3d is an up one, so do not present it as one electron keeping its spin; the point is the final arrangement. Answer to the unpaired question: 6. Same teaching label as Cu: measured ground state. Mo (same group, one period down) is an exception too, and W is not; not taught, not checked here.</a:t>
-            </a:r>
-          </a:p>
-          <a:p>
-            <a:r>
-              <a:t>STATIC FINAL STATE: print and handout copy, no animation. This slide shows the final state of the click build (Cr); the animated deck shows it one click at a time.</a:t>
+              <a:t>Chromium. The atom as the rules predict: [Ar] 4s^2 3d^4 (18 + 2 + 4 = 24): four up arrows in 3d and one empty box. The measured ground state: [Ar] 4s^1 3d^5, 18 + 1 + 5 = 24; every box in 4s and 3d holds exactly one up arrow, all spins parallel (Hund), so 6 unpaired electrons, more than iron's 4. The arrows are bookkeeping for the end state: the arrow that leaves 4s is the down one and the arrow that arrives in 3d is an up one, so do not present it as one electron keeping its spin; the point is the final arrangement. Answer to the unpaired question: 6. Same teaching label as Cu: measured ground state. Mo (same group, one period down) is an exception too, and W is not; not taught, not checked here.</a:t>
+            </a:r>
+          </a:p>
+          <a:p>
+            <a:r>
+              <a:t>STATIC FINAL STATE: print and handout copy, no animation. This slide shows the final state of the build (Cr).</a:t>
+            </a:r>
+          </a:p>
+          <a:p>
+            <a:r>
+              <a:t>Animated version: SHULL_CHEM_Slides_U02_S02.3.pptx has the click-by-click build.</a:t>
             </a:r>
           </a:p>
         </p:txBody>
@@ -2659,7 +2684,12 @@
           </a:p>
           <a:p>
             <a:r>
-              <a:t>STATIC FINAL STATE: print and handout copy, no animation. This slide shows the final state of the click build; the animated deck shows it one click at a time.</a:t>
+              <a:t>STATIC FINAL STATE: print and handout copy, no animation. This slide shows the final state of the build.</a:t>
+            </a:r>
+          </a:p>
+          <a:p>
+            <a:r>
+              <a:t>Animated version: SHULL_CHEM_Slides_U02_S02.3.pptx has the click-by-click build.</a:t>
             </a:r>
           </a:p>
         </p:txBody>
@@ -2745,12 +2775,17 @@
           <a:lstStyle/>
           <a:p>
             <a:r>
-              <a:t>Click build (see scripts/add_click_builds.py): the three 2p boxes fly in, then one arrow per click: up, up, up (Hund: singles first), then down in box 1 (Pauli: a pair has opposite spins). Result: 2p^4 with one pair and two singles, so 2 unpaired electrons. Have students draw each arrow in their notes at the same click. Same filling as the oxygen example later in this deck.</a:t>
-            </a:r>
-          </a:p>
-          <a:p>
-            <a:r>
-              <a:t>STATIC FINAL STATE: print and handout copy, no animation. This slide shows the final state of the click build; the animated deck shows it one click at a time.</a:t>
+              <a:t>The three 2p boxes hold the oxygen filling: one up arrow in each box first (Hund: singles first), then a down arrow in box 1 (Pauli: a pair has opposite spins). Result: 2p^4 with one pair and two singles, so 2 unpaired electrons. Have students draw the arrows in their notes in that order. Same filling as the oxygen example later in this deck.</a:t>
+            </a:r>
+          </a:p>
+          <a:p>
+            <a:r>
+              <a:t>STATIC FINAL STATE: print and handout copy, no animation. This slide shows the final state of the build.</a:t>
+            </a:r>
+          </a:p>
+          <a:p>
+            <a:r>
+              <a:t>Animated version: SHULL_CHEM_Slides_U02_S02.3.pptx has the click-by-click build.</a:t>
             </a:r>
           </a:p>
         </p:txBody>

--- a/deliverables/chem-u02/SHULL_CHEM_Slides_U02_S02.3_Static.pptx
+++ b/deliverables/chem-u02/SHULL_CHEM_Slides_U02_S02.3_Static.pptx
@@ -804,7 +804,7 @@
           <a:p>
             <a:r>
               <a:rPr lang="en-US" dirty="0"/>
-              <a:t>Second orbital-diagram example, after oxygen. Students copy the setup, then work it; answer on the next slide. Fe, Z = 26. Fill 4s before 3d, and we write 4s ahead of 3d (filling-order notation, PROVISIONAL convention). Only the 4s and 3d boxes are drawn; the first 18 electrons (through 3p) are just counted. The [Ar] label on the next slide previews noble-gas shorthand, which has not been taught yet at this point: say 'the first 18 electrons, the same as argon' and let the shorthand slides name it. Image prompt (aside slot): a rusted iron nail on a white bench.</a:t>
+              <a:t>Second orbital-diagram example, after oxygen. Students copy the setup, then work it; answer on the next slide. Fe, Z = 26. Fill 4s before 3d, and we write 4s ahead of 3d (filling-order notation, PROVISIONAL convention). Only the 4s and 3d boxes are drawn; the first 18 electrons (through 3p) are just counted. The next slide counts them as 'the first 18 electrons'; the noble-gas shorthand has not been taught yet at this point, so do not name it and let the shorthand slides do that. Image prompt (aside slot): a rusted iron nail on a white bench.</a:t>
             </a:r>
             <a:endParaRPr lang="en-US" dirty="0"/>
           </a:p>
@@ -891,7 +891,7 @@
           <a:lstStyle/>
           <a:p>
             <a:r>
-              <a:t>Fe: 1s^2 2s^2 2p^6 3s^2 3p^6 4s^2 3d^6, written with the first 18 as [Ar] 4s^2 3d^6, 18 + 2 + 6 = 26. The 3d boxes hold one pair and four singles, so 4 unpaired. The 4s pair is drawn first, then the 3d boxes (Hund: one up arrow in each box, then pair). [Ar] here is a preview of the noble-gas shorthand taught two slides later; treat it as 'the first 18'.</a:t>
+              <a:t>Fe: 1s^2 2s^2 2p^6 3s^2 3p^6 4s^2 3d^6, 2+2+6+2+6+2+6 = 26. The diagram draws only 4s and 3d; the first 18 electrons (through 3p) are counted, not drawn, so its sum reads first 18 + 2 + 6 = 26. The 3d boxes hold one pair and four singles, so 4 unpaired. The 4s pair is drawn first, then the 3d boxes (Hund: one up arrow in each box, then pair). No [Ar] appears on this slide: the noble-gas shorthand is taught two slides later (slide 15), so say 'the first 18 electrons' here.</a:t>
             </a:r>
           </a:p>
           <a:p>
@@ -1076,7 +1076,7 @@
           <a:p>
             <a:r>
               <a:rPr lang="en-US" dirty="0"/>
-              <a:t>COMMON ERROR (brief): using the noble gas of the same period, or the element's own. Cl is period 3, so the core is [Ne], not [Ar]; the core is the previous period's noble gas. Shorthand: [Ne] 3s^2 3p^5, which equals the longhand 1s^2 2s^2 2p^6 3s^2 3p^5. Next slide: the same idea for germanium, built one click at a time (the longhand first, then the noble gas before it in brackets). Image prompt (concept slot): a neon sign tube glowing orange-red in a dark window.</a:t>
+              <a:t>COMMON ERROR (brief): using the noble gas of the same period, or the element's own. Cl is period 3, so the core is [Ne], not [Ar]; the core is the previous period's noble gas. Shorthand: [Ne] 3s^2 3p^5, which equals the longhand 1s^2 2s^2 2p^6 3s^2 3p^5. Next slide: the same idea for germanium (the longhand first, then the noble gas before it in brackets); in the animated deck that slide is built one click at a time, in the static deck it shows the finished line. Image prompt (concept slot): a neon sign tube glowing orange-red in a dark window.</a:t>
             </a:r>
             <a:endParaRPr lang="en-US" dirty="0"/>
           </a:p>
@@ -2156,7 +2156,7 @@
           <a:p>
             <a:r>
               <a:rPr lang="en-US" dirty="0"/>
-              <a:t>Answers on the next slide. Each was written as a ground state. (a) O: 1s^2 2s^2 2p^6 is 10 electrons, O has 8. (b) K: [Ar] 3d^1 puts 3d before 4s. (c) Ca: [Ne] 4s^2 is 12 electrons, wrong core. (d) Cr: [Ar] 4s^2 3d^4 obeys the rules but is not the real ground state. Replay the Chromium click build if students are unsure. Image prompt (aside slot): a page of student work with a few lines circled in red pen.</a:t>
+              <a:t>Answers on the next slide. Each was written as a ground state. (a) O: 1s^2 2s^2 2p^6 is 10 electrons, O has 8. (b) K: [Ar] 3d^1 puts 3d before 4s. (c) Ca: [Ne] 4s^2 is 12 electrons, wrong core. (d) Cr: [Ar] 4s^2 3d^4 obeys the rules but is not the real ground state. Revisit the Chromium exception slide if students are unsure. Image prompt (aside slot): a page of student work with a few lines circled in red pen.</a:t>
             </a:r>
             <a:endParaRPr lang="en-US" dirty="0"/>
           </a:p>
@@ -2244,7 +2244,7 @@
           <a:p>
             <a:r>
               <a:rPr lang="en-US" dirty="0"/>
-              <a:t>Corrected: (a) O 1s^2 2s^2 2p^4. (b) K [Ar] 4s^1. (c) Ca [Ar] 4s^2. (d) Cr [Ar] 4s^1 3d^5. (d) is the Chromium click build: predicted [Ar] 4s^2 3d^4, actual [Ar] 4s^1 3d^5. Teach 'rules-consistent' versus 'observed': (d) passes every rule on paper and is still not the real atom. Image prompt (data slot): a pencil resting on a page of crossed-out electron counts.</a:t>
+              <a:t>Corrected: (a) O 1s^2 2s^2 2p^4. (b) K [Ar] 4s^1. (c) Ca [Ar] 4s^2. (d) Cr [Ar] 4s^1 3d^5. (d) is the Chromium exception slide: predicted [Ar] 4s^2 3d^4, actual [Ar] 4s^1 3d^5. Teach 'rules-consistent' versus 'observed': (d) passes every rule on paper and is still not the real atom. Image prompt (data slot): a pencil resting on a page of crossed-out electron counts.</a:t>
             </a:r>
             <a:endParaRPr lang="en-US" dirty="0"/>
           </a:p>
@@ -2596,7 +2596,7 @@
           <a:p>
             <a:r>
               <a:rPr lang="en-US" dirty="0"/>
-              <a:t>Answers (re-derived). P, Z = 15: 1s^2 2s^2 2p^6 3s^2 3p^3, 2+2+6+2+3 = 15, 3 unpaired. S, Z = 16: [Ne] 3s^2 3p^4, 10+2+4 = 16; 3p boxes: one pair and two singles, 2 unpaired. Cu, Z = 29: [Ar] 4s^1 3d^10, 18+1+10 = 29. Exception: replay the Copper click build (slide 'Exception: Copper'): the rules predict [Ar] 4s^2 3d^9, one 4s electron moves into 3d, and the filled 3d lowers the atom's total energy slightly. That is the simplified reason from the Why slide (4s and 3d are close in energy); it does not predict every exception, so do not accept 'full is always more stable'. Image prompt (aside slot): a pencil and a blank sheet of lined paper on a lab bench.</a:t>
+              <a:t>Answers (re-derived). P, Z = 15: 1s^2 2s^2 2p^6 3s^2 3p^3, 2+2+6+2+3 = 15, 3 unpaired. S, Z = 16: [Ne] 3s^2 3p^4, 10+2+4 = 16; 3p boxes: one pair and two singles, 2 unpaired. Cu, Z = 29: [Ar] 4s^1 3d^10, 18+1+10 = 29. Exception: go back to the Copper exception slide ('Exception: Copper', a click build in the animated deck): the rules predict [Ar] 4s^2 3d^9, one 4s electron moves into 3d, and the filled 3d lowers the atom's total energy slightly. That is the simplified reason from the Why slide (4s and 3d are close in energy); it does not predict every exception, so do not accept 'full is always more stable'. Image prompt (aside slot): a pencil and a blank sheet of lined paper on a lab bench.</a:t>
             </a:r>
             <a:endParaRPr lang="en-US" dirty="0"/>
           </a:p>
@@ -14419,7 +14419,7 @@
                 <a:ea typeface="Trade Gothic Next" pitchFamily="34" charset="-122"/>
                 <a:cs typeface="Trade Gothic Next" pitchFamily="34" charset="-120"/>
               </a:rPr>
-              <a:t>Write the longhand configuration and the orbital diagram for oxygen.</a:t>
+              <a:t>Write the full configuration and the orbital diagram for oxygen.</a:t>
             </a:r>
             <a:endParaRPr lang="en-US" sz="1600" dirty="0"/>
           </a:p>
@@ -14600,7 +14600,7 @@
                 <a:ea typeface="Trade Gothic Next" pitchFamily="34" charset="-122"/>
                 <a:cs typeface="Trade Gothic Next" pitchFamily="34" charset="-120"/>
               </a:rPr>
-              <a:t>Longhand configuration</a:t>
+              <a:t>Full configuration</a:t>
             </a:r>
             <a:endParaRPr lang="en-US" sz="1600" dirty="0"/>
           </a:p>
@@ -16797,7 +16797,7 @@
                 <a:ea typeface="Trade Gothic Next" pitchFamily="34" charset="-122"/>
                 <a:cs typeface="Trade Gothic Next" pitchFamily="34" charset="-120"/>
               </a:rPr>
-              <a:t>Longhand configuration</a:t>
+              <a:t>Full configuration</a:t>
             </a:r>
             <a:endParaRPr lang="en-US" sz="1600" dirty="0"/>
           </a:p>
@@ -17162,7 +17162,7 @@
                 <a:ea typeface="Trade Gothic Next" pitchFamily="34" charset="-122"/>
                 <a:cs typeface="Trade Gothic Next" pitchFamily="34" charset="-120"/>
               </a:rPr>
-              <a:t>LONGHAND</a:t>
+              <a:t>FULL CONFIGURATION</a:t>
             </a:r>
             <a:endParaRPr lang="en-US" sz="1200" dirty="0"/>
           </a:p>
@@ -17429,7 +17429,7 @@
                 <a:ea typeface="Trade Gothic Next" pitchFamily="34" charset="-122"/>
                 <a:cs typeface="Trade Gothic Next" pitchFamily="34" charset="-120"/>
               </a:rPr>
-              <a:t>[Ar] 4s</a:t>
+              <a:t>1s</a:t>
             </a:r>
             <a:pPr indent="0" marL="0">
               <a:buNone/>
@@ -17457,6 +17457,149 @@
                 <a:ea typeface="Trade Gothic Next" pitchFamily="34" charset="-122"/>
                 <a:cs typeface="Trade Gothic Next" pitchFamily="34" charset="-120"/>
               </a:rPr>
+              <a:t> 2s</a:t>
+            </a:r>
+            <a:pPr indent="0" marL="0">
+              <a:buNone/>
+            </a:pPr>
+            <a:r>
+              <a:rPr lang="en-US" sz="1900" baseline="30000" dirty="0">
+                <a:solidFill>
+                  <a:srgbClr val="14161B"/>
+                </a:solidFill>
+                <a:latin typeface="Trade Gothic Next" pitchFamily="34" charset="0"/>
+                <a:ea typeface="Trade Gothic Next" pitchFamily="34" charset="-122"/>
+                <a:cs typeface="Trade Gothic Next" pitchFamily="34" charset="-120"/>
+              </a:rPr>
+              <a:t>2</a:t>
+            </a:r>
+            <a:pPr indent="0" marL="0">
+              <a:buNone/>
+            </a:pPr>
+            <a:r>
+              <a:rPr lang="en-US" sz="1900" dirty="0">
+                <a:solidFill>
+                  <a:srgbClr val="14161B"/>
+                </a:solidFill>
+                <a:latin typeface="Trade Gothic Next" pitchFamily="34" charset="0"/>
+                <a:ea typeface="Trade Gothic Next" pitchFamily="34" charset="-122"/>
+                <a:cs typeface="Trade Gothic Next" pitchFamily="34" charset="-120"/>
+              </a:rPr>
+              <a:t> 2p</a:t>
+            </a:r>
+            <a:pPr indent="0" marL="0">
+              <a:buNone/>
+            </a:pPr>
+            <a:r>
+              <a:rPr lang="en-US" sz="1900" baseline="30000" dirty="0">
+                <a:solidFill>
+                  <a:srgbClr val="14161B"/>
+                </a:solidFill>
+                <a:latin typeface="Trade Gothic Next" pitchFamily="34" charset="0"/>
+                <a:ea typeface="Trade Gothic Next" pitchFamily="34" charset="-122"/>
+                <a:cs typeface="Trade Gothic Next" pitchFamily="34" charset="-120"/>
+              </a:rPr>
+              <a:t>6</a:t>
+            </a:r>
+            <a:pPr indent="0" marL="0">
+              <a:buNone/>
+            </a:pPr>
+            <a:r>
+              <a:rPr lang="en-US" sz="1900" dirty="0">
+                <a:solidFill>
+                  <a:srgbClr val="14161B"/>
+                </a:solidFill>
+                <a:latin typeface="Trade Gothic Next" pitchFamily="34" charset="0"/>
+                <a:ea typeface="Trade Gothic Next" pitchFamily="34" charset="-122"/>
+                <a:cs typeface="Trade Gothic Next" pitchFamily="34" charset="-120"/>
+              </a:rPr>
+              <a:t> 3s</a:t>
+            </a:r>
+            <a:pPr indent="0" marL="0">
+              <a:buNone/>
+            </a:pPr>
+            <a:r>
+              <a:rPr lang="en-US" sz="1900" baseline="30000" dirty="0">
+                <a:solidFill>
+                  <a:srgbClr val="14161B"/>
+                </a:solidFill>
+                <a:latin typeface="Trade Gothic Next" pitchFamily="34" charset="0"/>
+                <a:ea typeface="Trade Gothic Next" pitchFamily="34" charset="-122"/>
+                <a:cs typeface="Trade Gothic Next" pitchFamily="34" charset="-120"/>
+              </a:rPr>
+              <a:t>2</a:t>
+            </a:r>
+            <a:pPr indent="0" marL="0">
+              <a:buNone/>
+            </a:pPr>
+            <a:r>
+              <a:rPr lang="en-US" sz="1900" dirty="0">
+                <a:solidFill>
+                  <a:srgbClr val="14161B"/>
+                </a:solidFill>
+                <a:latin typeface="Trade Gothic Next" pitchFamily="34" charset="0"/>
+                <a:ea typeface="Trade Gothic Next" pitchFamily="34" charset="-122"/>
+                <a:cs typeface="Trade Gothic Next" pitchFamily="34" charset="-120"/>
+              </a:rPr>
+              <a:t> 3p</a:t>
+            </a:r>
+            <a:pPr indent="0" marL="0">
+              <a:buNone/>
+            </a:pPr>
+            <a:r>
+              <a:rPr lang="en-US" sz="1900" baseline="30000" dirty="0">
+                <a:solidFill>
+                  <a:srgbClr val="14161B"/>
+                </a:solidFill>
+                <a:latin typeface="Trade Gothic Next" pitchFamily="34" charset="0"/>
+                <a:ea typeface="Trade Gothic Next" pitchFamily="34" charset="-122"/>
+                <a:cs typeface="Trade Gothic Next" pitchFamily="34" charset="-120"/>
+              </a:rPr>
+              <a:t>6</a:t>
+            </a:r>
+            <a:endParaRPr lang="en-US" sz="1900" dirty="0"/>
+          </a:p>
+          <a:p>
+            <a:pPr indent="0" marL="0">
+              <a:buNone/>
+            </a:pPr>
+            <a:r>
+              <a:rPr lang="en-US" sz="1900" dirty="0">
+                <a:solidFill>
+                  <a:srgbClr val="14161B"/>
+                </a:solidFill>
+                <a:latin typeface="Trade Gothic Next" pitchFamily="34" charset="0"/>
+                <a:ea typeface="Trade Gothic Next" pitchFamily="34" charset="-122"/>
+                <a:cs typeface="Trade Gothic Next" pitchFamily="34" charset="-120"/>
+              </a:rPr>
+              <a:t>4s</a:t>
+            </a:r>
+            <a:pPr indent="0" marL="0">
+              <a:buNone/>
+            </a:pPr>
+            <a:r>
+              <a:rPr lang="en-US" sz="1900" baseline="30000" dirty="0">
+                <a:solidFill>
+                  <a:srgbClr val="14161B"/>
+                </a:solidFill>
+                <a:latin typeface="Trade Gothic Next" pitchFamily="34" charset="0"/>
+                <a:ea typeface="Trade Gothic Next" pitchFamily="34" charset="-122"/>
+                <a:cs typeface="Trade Gothic Next" pitchFamily="34" charset="-120"/>
+              </a:rPr>
+              <a:t>2</a:t>
+            </a:r>
+            <a:pPr indent="0" marL="0">
+              <a:buNone/>
+            </a:pPr>
+            <a:r>
+              <a:rPr lang="en-US" sz="1900" dirty="0">
+                <a:solidFill>
+                  <a:srgbClr val="14161B"/>
+                </a:solidFill>
+                <a:latin typeface="Trade Gothic Next" pitchFamily="34" charset="0"/>
+                <a:ea typeface="Trade Gothic Next" pitchFamily="34" charset="-122"/>
+                <a:cs typeface="Trade Gothic Next" pitchFamily="34" charset="-120"/>
+              </a:rPr>
               <a:t> 3d</a:t>
             </a:r>
             <a:pPr indent="0" marL="0">
@@ -17488,7 +17631,7 @@
                 <a:ea typeface="Trade Gothic Next" pitchFamily="34" charset="-122"/>
                 <a:cs typeface="Trade Gothic Next" pitchFamily="34" charset="-120"/>
               </a:rPr>
-              <a:t>18 + 2 + 6 = 26</a:t>
+              <a:t>2+2+6+2+6+2+6 = 26</a:t>
             </a:r>
             <a:endParaRPr lang="en-US" sz="1900" dirty="0"/>
           </a:p>
@@ -18754,7 +18897,7 @@
                 </a:solidFill>
                 <a:latin typeface="Trade Gothic Next"/>
               </a:rPr>
-              <a:t>[Ar] 18 + 2 + 6 = 26</a:t>
+              <a:t>first 18 + 2 + 6 = 26</a:t>
             </a:r>
           </a:p>
         </p:txBody>
@@ -24825,7 +24968,7 @@
                 <a:ea typeface="Trade Gothic Next" pitchFamily="34" charset="-122"/>
                 <a:cs typeface="Trade Gothic Next" pitchFamily="34" charset="-120"/>
               </a:rPr>
-              <a:t>. Watch what the real atom does.</a:t>
+              <a:t>. Compare it with the real atom.</a:t>
             </a:r>
             <a:endParaRPr lang="en-US" sz="1700" dirty="0"/>
           </a:p>
@@ -24866,7 +25009,7 @@
                 <a:ea typeface="Trade Gothic Next" pitchFamily="34" charset="-122"/>
                 <a:cs typeface="Trade Gothic Next" pitchFamily="34" charset="-120"/>
               </a:rPr>
-              <a:t>WATCH</a:t>
+              <a:t>COMPARE</a:t>
             </a:r>
             <a:endParaRPr lang="en-US" sz="1200" dirty="0"/>
           </a:p>
@@ -24907,7 +25050,7 @@
                 <a:ea typeface="Trade Gothic Next" pitchFamily="34" charset="-122"/>
                 <a:cs typeface="Trade Gothic Next" pitchFamily="34" charset="-120"/>
               </a:rPr>
-              <a:t>Which sublevel loses an electron, and which gains one?</a:t>
+              <a:t>Predicted versus actual: which sublevel loses an electron, and which gains one?</a:t>
             </a:r>
             <a:endParaRPr lang="en-US" sz="1600" dirty="0"/>
           </a:p>
@@ -26734,7 +26877,7 @@
                 <a:ea typeface="Trade Gothic Next" pitchFamily="34" charset="-122"/>
                 <a:cs typeface="Trade Gothic Next" pitchFamily="34" charset="-120"/>
               </a:rPr>
-              <a:t>WATCH</a:t>
+              <a:t>COMPARE</a:t>
             </a:r>
             <a:endParaRPr lang="en-US" sz="1200" dirty="0"/>
           </a:p>
@@ -26775,7 +26918,7 @@
                 <a:ea typeface="Trade Gothic Next" pitchFamily="34" charset="-122"/>
                 <a:cs typeface="Trade Gothic Next" pitchFamily="34" charset="-120"/>
               </a:rPr>
-              <a:t>Count the arrows in 3d before and after.</a:t>
+              <a:t>Count the arrows in 3d, predicted versus actual.</a:t>
             </a:r>
             <a:endParaRPr lang="en-US" sz="1600" dirty="0"/>
           </a:p>
